--- a/01_FoundationProjects/MFL06_Stepper_Accelerometer/MFL06_Stepper_Accelerometer.pptx
+++ b/01_FoundationProjects/MFL06_Stepper_Accelerometer/MFL06_Stepper_Accelerometer.pptx
@@ -265,7 +265,7 @@
           <a:p>
             <a:fld id="{375049E3-AEF5-412D-9F98-5201579F9569}" type="datetimeFigureOut">
               <a:rPr lang="en-GB" smtClean="0"/>
-              <a:t>26/12/2025</a:t>
+              <a:t>18/01/2026</a:t>
             </a:fld>
             <a:endParaRPr lang="en-GB"/>
           </a:p>
@@ -465,7 +465,7 @@
           <a:p>
             <a:fld id="{375049E3-AEF5-412D-9F98-5201579F9569}" type="datetimeFigureOut">
               <a:rPr lang="en-GB" smtClean="0"/>
-              <a:t>26/12/2025</a:t>
+              <a:t>18/01/2026</a:t>
             </a:fld>
             <a:endParaRPr lang="en-GB"/>
           </a:p>
@@ -675,7 +675,7 @@
           <a:p>
             <a:fld id="{375049E3-AEF5-412D-9F98-5201579F9569}" type="datetimeFigureOut">
               <a:rPr lang="en-GB" smtClean="0"/>
-              <a:t>26/12/2025</a:t>
+              <a:t>18/01/2026</a:t>
             </a:fld>
             <a:endParaRPr lang="en-GB"/>
           </a:p>
@@ -875,7 +875,7 @@
           <a:p>
             <a:fld id="{375049E3-AEF5-412D-9F98-5201579F9569}" type="datetimeFigureOut">
               <a:rPr lang="en-GB" smtClean="0"/>
-              <a:t>26/12/2025</a:t>
+              <a:t>18/01/2026</a:t>
             </a:fld>
             <a:endParaRPr lang="en-GB"/>
           </a:p>
@@ -1151,7 +1151,7 @@
           <a:p>
             <a:fld id="{375049E3-AEF5-412D-9F98-5201579F9569}" type="datetimeFigureOut">
               <a:rPr lang="en-GB" smtClean="0"/>
-              <a:t>26/12/2025</a:t>
+              <a:t>18/01/2026</a:t>
             </a:fld>
             <a:endParaRPr lang="en-GB"/>
           </a:p>
@@ -1419,7 +1419,7 @@
           <a:p>
             <a:fld id="{375049E3-AEF5-412D-9F98-5201579F9569}" type="datetimeFigureOut">
               <a:rPr lang="en-GB" smtClean="0"/>
-              <a:t>26/12/2025</a:t>
+              <a:t>18/01/2026</a:t>
             </a:fld>
             <a:endParaRPr lang="en-GB"/>
           </a:p>
@@ -1834,7 +1834,7 @@
           <a:p>
             <a:fld id="{375049E3-AEF5-412D-9F98-5201579F9569}" type="datetimeFigureOut">
               <a:rPr lang="en-GB" smtClean="0"/>
-              <a:t>26/12/2025</a:t>
+              <a:t>18/01/2026</a:t>
             </a:fld>
             <a:endParaRPr lang="en-GB"/>
           </a:p>
@@ -1976,7 +1976,7 @@
           <a:p>
             <a:fld id="{375049E3-AEF5-412D-9F98-5201579F9569}" type="datetimeFigureOut">
               <a:rPr lang="en-GB" smtClean="0"/>
-              <a:t>26/12/2025</a:t>
+              <a:t>18/01/2026</a:t>
             </a:fld>
             <a:endParaRPr lang="en-GB"/>
           </a:p>
@@ -2089,7 +2089,7 @@
           <a:p>
             <a:fld id="{375049E3-AEF5-412D-9F98-5201579F9569}" type="datetimeFigureOut">
               <a:rPr lang="en-GB" smtClean="0"/>
-              <a:t>26/12/2025</a:t>
+              <a:t>18/01/2026</a:t>
             </a:fld>
             <a:endParaRPr lang="en-GB"/>
           </a:p>
@@ -2402,7 +2402,7 @@
           <a:p>
             <a:fld id="{375049E3-AEF5-412D-9F98-5201579F9569}" type="datetimeFigureOut">
               <a:rPr lang="en-GB" smtClean="0"/>
-              <a:t>26/12/2025</a:t>
+              <a:t>18/01/2026</a:t>
             </a:fld>
             <a:endParaRPr lang="en-GB"/>
           </a:p>
@@ -2691,7 +2691,7 @@
           <a:p>
             <a:fld id="{375049E3-AEF5-412D-9F98-5201579F9569}" type="datetimeFigureOut">
               <a:rPr lang="en-GB" smtClean="0"/>
-              <a:t>26/12/2025</a:t>
+              <a:t>18/01/2026</a:t>
             </a:fld>
             <a:endParaRPr lang="en-GB"/>
           </a:p>
@@ -2934,7 +2934,7 @@
           <a:p>
             <a:fld id="{375049E3-AEF5-412D-9F98-5201579F9569}" type="datetimeFigureOut">
               <a:rPr lang="en-GB" smtClean="0"/>
-              <a:t>26/12/2025</a:t>
+              <a:t>18/01/2026</a:t>
             </a:fld>
             <a:endParaRPr lang="en-GB"/>
           </a:p>
@@ -4199,7 +4199,7 @@
         <p:spPr>
           <a:xfrm>
             <a:off x="7031990" y="2445206"/>
-            <a:ext cx="4309253" cy="1200329"/>
+            <a:ext cx="4309253" cy="1477328"/>
           </a:xfrm>
           <a:prstGeom prst="rect">
             <a:avLst/>
@@ -4223,7 +4223,7 @@
               <a:rPr lang="en-GB" dirty="0">
                 <a:hlinkClick r:id="rId2"/>
               </a:rPr>
-              <a:t>https://github.com/info-zas/zas-robotics-motion/blob/main/01_FoundationProjects/MFL06/MFL06/MFL06.ino</a:t>
+              <a:t>https://github.com/info-zas/zas-robotics-motion/tree/main/01_FoundationProjects/MFL06_Stepper_Accelerometer/MFL06_Stepper_Accelerometer</a:t>
             </a:r>
             <a:endParaRPr lang="en-GB" dirty="0"/>
           </a:p>
@@ -4339,8 +4339,8 @@
         </p:nvSpPr>
         <p:spPr bwMode="auto">
           <a:xfrm>
-            <a:off x="6943591" y="1938100"/>
-            <a:ext cx="5599912" cy="369332"/>
+            <a:off x="6943591" y="1780401"/>
+            <a:ext cx="5599912" cy="646331"/>
           </a:xfrm>
           <a:prstGeom prst="rect">
             <a:avLst/>
@@ -4452,7 +4452,7 @@
             </a:pPr>
             <a:r>
               <a:rPr lang="en-GB" b="1" dirty="0"/>
-              <a:t>Code for Lesson MFL06 (MFL06.ino):</a:t>
+              <a:t>Code for Lesson MFL06 (MFL06_Stepper_Accelerometer.ino):</a:t>
             </a:r>
           </a:p>
         </p:txBody>
@@ -4757,7 +4757,7 @@
         <p:spPr>
           <a:xfrm>
             <a:off x="606099" y="1542997"/>
-            <a:ext cx="6093994" cy="646331"/>
+            <a:ext cx="6093994" cy="369332"/>
           </a:xfrm>
           <a:prstGeom prst="rect">
             <a:avLst/>
@@ -4772,56 +4772,8 @@
           <a:p>
             <a:r>
               <a:rPr lang="en-GB" sz="1800" b="1" dirty="0"/>
-              <a:t>Execute the same code (MFL05.ino) in the motion creative board</a:t>
-            </a:r>
-          </a:p>
-        </p:txBody>
-      </p:sp>
-      <p:sp>
-        <p:nvSpPr>
-          <p:cNvPr id="4" name="TextBox 3">
-            <a:extLst>
-              <a:ext uri="{FF2B5EF4-FFF2-40B4-BE49-F238E27FC236}">
-                <a16:creationId xmlns:a16="http://schemas.microsoft.com/office/drawing/2014/main" id="{AC514551-EBEB-F0C1-E417-FCBD36193F47}"/>
-              </a:ext>
-            </a:extLst>
-          </p:cNvPr>
-          <p:cNvSpPr txBox="1"/>
-          <p:nvPr/>
-        </p:nvSpPr>
-        <p:spPr>
-          <a:xfrm>
-            <a:off x="479056" y="3241011"/>
-            <a:ext cx="4885191" cy="1200329"/>
-          </a:xfrm>
-          <a:prstGeom prst="rect">
-            <a:avLst/>
-          </a:prstGeom>
-          <a:noFill/>
-          <a:ln>
-            <a:solidFill>
-              <a:schemeClr val="accent1">
-                <a:lumMod val="75000"/>
-              </a:schemeClr>
-            </a:solidFill>
-          </a:ln>
-        </p:spPr>
-        <p:txBody>
-          <a:bodyPr wrap="square">
-            <a:spAutoFit/>
-          </a:bodyPr>
-          <a:lstStyle/>
-          <a:p>
-            <a:r>
-              <a:rPr lang="en-GB" dirty="0">
-                <a:hlinkClick r:id="rId2"/>
-              </a:rPr>
-              <a:t>https://github.com/info-zas/zas-robotics-motion/blob/main/01_FoundationProjects/MFL06/MFL06/MFL06.ino</a:t>
-            </a:r>
-            <a:endParaRPr lang="en-GB" dirty="0"/>
-          </a:p>
-          <a:p>
-            <a:endParaRPr lang="en-GB" dirty="0"/>
+              <a:t>Execute the same code in the motion creative board</a:t>
+            </a:r>
           </a:p>
         </p:txBody>
       </p:sp>
@@ -4897,7 +4849,7 @@
           <p:nvPr/>
         </p:nvPicPr>
         <p:blipFill>
-          <a:blip r:embed="rId3" cstate="print">
+          <a:blip r:embed="rId2" cstate="print">
             <a:extLst>
               <a:ext uri="{28A0092B-C50C-407E-A947-70E740481C1C}">
                 <a14:useLocalDpi xmlns:a14="http://schemas.microsoft.com/office/drawing/2010/main" val="0"/>
@@ -4933,7 +4885,7 @@
           <p:nvPr/>
         </p:nvPicPr>
         <p:blipFill>
-          <a:blip r:embed="rId4">
+          <a:blip r:embed="rId3">
             <a:extLst>
               <a:ext uri="{28A0092B-C50C-407E-A947-70E740481C1C}">
                 <a14:useLocalDpi xmlns:a14="http://schemas.microsoft.com/office/drawing/2010/main" val="0"/>
@@ -5008,20 +4960,191 @@
       </p:sp>
       <p:sp>
         <p:nvSpPr>
-          <p:cNvPr id="13" name="TextBox 12">
-            <a:extLst>
-              <a:ext uri="{FF2B5EF4-FFF2-40B4-BE49-F238E27FC236}">
-                <a16:creationId xmlns:a16="http://schemas.microsoft.com/office/drawing/2014/main" id="{32FF63D9-889B-6E8C-8283-4FAE5E2DB6B6}"/>
+          <p:cNvPr id="10" name="Title 1">
+            <a:extLst>
+              <a:ext uri="{FF2B5EF4-FFF2-40B4-BE49-F238E27FC236}">
+                <a16:creationId xmlns:a16="http://schemas.microsoft.com/office/drawing/2014/main" id="{77ADCA91-4979-7967-74B1-C8285AA4D888}"/>
+              </a:ext>
+            </a:extLst>
+          </p:cNvPr>
+          <p:cNvSpPr>
+            <a:spLocks noGrp="1"/>
+          </p:cNvSpPr>
+          <p:nvPr>
+            <p:ph type="title"/>
+          </p:nvPr>
+        </p:nvSpPr>
+        <p:spPr>
+          <a:xfrm>
+            <a:off x="693234" y="381128"/>
+            <a:ext cx="11193966" cy="1325563"/>
+          </a:xfrm>
+        </p:spPr>
+        <p:txBody>
+          <a:bodyPr vert="horz" lIns="91440" tIns="45720" rIns="91440" bIns="45720" rtlCol="0" anchor="ctr">
+            <a:normAutofit fontScale="90000"/>
+          </a:bodyPr>
+          <a:lstStyle/>
+          <a:p>
+            <a:r>
+              <a:rPr lang="en-GB" b="1" dirty="0">
+                <a:solidFill>
+                  <a:srgbClr val="FF3300"/>
+                </a:solidFill>
+                <a:latin typeface="Calibri Light" panose="020F0302020204030204" pitchFamily="34" charset="0"/>
+                <a:ea typeface="Calibri Light" panose="020F0302020204030204" pitchFamily="34" charset="0"/>
+                <a:cs typeface="Calibri Light" panose="020F0302020204030204" pitchFamily="34" charset="0"/>
+              </a:rPr>
+              <a:t>MFL06 :</a:t>
+            </a:r>
+            <a:br>
+              <a:rPr lang="en-GB" b="1" dirty="0">
+                <a:solidFill>
+                  <a:srgbClr val="FF0000"/>
+                </a:solidFill>
+                <a:latin typeface="Calibri Light" panose="020F0302020204030204" pitchFamily="34" charset="0"/>
+                <a:ea typeface="Calibri Light" panose="020F0302020204030204" pitchFamily="34" charset="0"/>
+                <a:cs typeface="Calibri Light" panose="020F0302020204030204" pitchFamily="34" charset="0"/>
+              </a:rPr>
+            </a:br>
+            <a:r>
+              <a:rPr lang="en-US" b="1" dirty="0">
+                <a:solidFill>
+                  <a:srgbClr val="FF3300"/>
+                </a:solidFill>
+                <a:latin typeface="Calibri Light" panose="020F0302020204030204" pitchFamily="34" charset="0"/>
+                <a:ea typeface="Calibri Light" panose="020F0302020204030204" pitchFamily="34" charset="0"/>
+                <a:cs typeface="Calibri Light" panose="020F0302020204030204" pitchFamily="34" charset="0"/>
+              </a:rPr>
+              <a:t>Stepper Motor Control with Accelerometer MPU6050</a:t>
+            </a:r>
+            <a:endParaRPr lang="en-GB" b="1" dirty="0">
+              <a:solidFill>
+                <a:srgbClr val="FF3300"/>
+              </a:solidFill>
+              <a:latin typeface="Calibri Light" panose="020F0302020204030204" pitchFamily="34" charset="0"/>
+              <a:ea typeface="Calibri Light" panose="020F0302020204030204" pitchFamily="34" charset="0"/>
+              <a:cs typeface="Calibri Light" panose="020F0302020204030204" pitchFamily="34" charset="0"/>
+            </a:endParaRPr>
+          </a:p>
+        </p:txBody>
+      </p:sp>
+      <p:sp>
+        <p:nvSpPr>
+          <p:cNvPr id="14" name="Rectangle 13">
+            <a:extLst>
+              <a:ext uri="{FF2B5EF4-FFF2-40B4-BE49-F238E27FC236}">
+                <a16:creationId xmlns:a16="http://schemas.microsoft.com/office/drawing/2014/main" id="{5E3CDE97-84C3-1876-82AC-C63AC20F50A3}"/>
+              </a:ext>
+            </a:extLst>
+          </p:cNvPr>
+          <p:cNvSpPr/>
+          <p:nvPr/>
+        </p:nvSpPr>
+        <p:spPr>
+          <a:xfrm>
+            <a:off x="9640530" y="3241012"/>
+            <a:ext cx="2072414" cy="1944942"/>
+          </a:xfrm>
+          <a:prstGeom prst="rect">
+            <a:avLst/>
+          </a:prstGeom>
+          <a:noFill/>
+          <a:ln w="57150">
+            <a:solidFill>
+              <a:srgbClr val="FFFF00"/>
+            </a:solidFill>
+          </a:ln>
+        </p:spPr>
+        <p:style>
+          <a:lnRef idx="2">
+            <a:schemeClr val="accent1">
+              <a:shade val="15000"/>
+            </a:schemeClr>
+          </a:lnRef>
+          <a:fillRef idx="1">
+            <a:schemeClr val="accent1"/>
+          </a:fillRef>
+          <a:effectRef idx="0">
+            <a:schemeClr val="accent1"/>
+          </a:effectRef>
+          <a:fontRef idx="minor">
+            <a:schemeClr val="lt1"/>
+          </a:fontRef>
+        </p:style>
+        <p:txBody>
+          <a:bodyPr rtlCol="0" anchor="ctr"/>
+          <a:lstStyle/>
+          <a:p>
+            <a:pPr algn="ctr"/>
+            <a:endParaRPr lang="en-GB"/>
+          </a:p>
+        </p:txBody>
+      </p:sp>
+      <p:sp>
+        <p:nvSpPr>
+          <p:cNvPr id="2" name="TextBox 1">
+            <a:extLst>
+              <a:ext uri="{FF2B5EF4-FFF2-40B4-BE49-F238E27FC236}">
+                <a16:creationId xmlns:a16="http://schemas.microsoft.com/office/drawing/2014/main" id="{6284A88A-97C5-074B-475C-4157E856EDC3}"/>
               </a:ext>
             </a:extLst>
           </p:cNvPr>
           <p:cNvSpPr txBox="1"/>
           <p:nvPr/>
         </p:nvSpPr>
+        <p:spPr>
+          <a:xfrm>
+            <a:off x="597528" y="5052632"/>
+            <a:ext cx="4309253" cy="1477328"/>
+          </a:xfrm>
+          <a:prstGeom prst="rect">
+            <a:avLst/>
+          </a:prstGeom>
+          <a:noFill/>
+          <a:ln w="28575">
+            <a:solidFill>
+              <a:schemeClr val="accent1">
+                <a:lumMod val="75000"/>
+              </a:schemeClr>
+            </a:solidFill>
+          </a:ln>
+        </p:spPr>
+        <p:txBody>
+          <a:bodyPr wrap="square">
+            <a:spAutoFit/>
+          </a:bodyPr>
+          <a:lstStyle/>
+          <a:p>
+            <a:r>
+              <a:rPr lang="en-GB" dirty="0">
+                <a:hlinkClick r:id="rId4"/>
+              </a:rPr>
+              <a:t>https://github.com/info-zas/zas-robotics-motion/tree/main/01_FoundationProjects/MFL06_Stepper_Accelerometer/MFL06_Stepper_Accelerometer</a:t>
+            </a:r>
+            <a:endParaRPr lang="en-GB" dirty="0"/>
+          </a:p>
+          <a:p>
+            <a:endParaRPr lang="en-GB" dirty="0"/>
+          </a:p>
+        </p:txBody>
+      </p:sp>
+      <p:sp>
+        <p:nvSpPr>
+          <p:cNvPr id="3" name="TextBox 2">
+            <a:extLst>
+              <a:ext uri="{FF2B5EF4-FFF2-40B4-BE49-F238E27FC236}">
+                <a16:creationId xmlns:a16="http://schemas.microsoft.com/office/drawing/2014/main" id="{55720546-56E0-3C50-7A2F-9140500A86EC}"/>
+              </a:ext>
+            </a:extLst>
+          </p:cNvPr>
+          <p:cNvSpPr txBox="1"/>
+          <p:nvPr/>
+        </p:nvSpPr>
         <p:spPr bwMode="auto">
           <a:xfrm>
-            <a:off x="479056" y="2602026"/>
-            <a:ext cx="3783402" cy="369332"/>
+            <a:off x="509129" y="4387827"/>
+            <a:ext cx="5599912" cy="646331"/>
           </a:xfrm>
           <a:prstGeom prst="rect">
             <a:avLst/>
@@ -5133,131 +5256,8 @@
             </a:pPr>
             <a:r>
               <a:rPr lang="en-GB" b="1" dirty="0"/>
-              <a:t>Code for Lesson MFL06 (MFL06.ino):</a:t>
-            </a:r>
-          </a:p>
-        </p:txBody>
-      </p:sp>
-      <p:sp>
-        <p:nvSpPr>
-          <p:cNvPr id="10" name="Title 1">
-            <a:extLst>
-              <a:ext uri="{FF2B5EF4-FFF2-40B4-BE49-F238E27FC236}">
-                <a16:creationId xmlns:a16="http://schemas.microsoft.com/office/drawing/2014/main" id="{77ADCA91-4979-7967-74B1-C8285AA4D888}"/>
-              </a:ext>
-            </a:extLst>
-          </p:cNvPr>
-          <p:cNvSpPr>
-            <a:spLocks noGrp="1"/>
-          </p:cNvSpPr>
-          <p:nvPr>
-            <p:ph type="title"/>
-          </p:nvPr>
-        </p:nvSpPr>
-        <p:spPr>
-          <a:xfrm>
-            <a:off x="693234" y="381128"/>
-            <a:ext cx="11193966" cy="1325563"/>
-          </a:xfrm>
-        </p:spPr>
-        <p:txBody>
-          <a:bodyPr vert="horz" lIns="91440" tIns="45720" rIns="91440" bIns="45720" rtlCol="0" anchor="ctr">
-            <a:normAutofit fontScale="90000"/>
-          </a:bodyPr>
-          <a:lstStyle/>
-          <a:p>
-            <a:r>
-              <a:rPr lang="en-GB" b="1" dirty="0">
-                <a:solidFill>
-                  <a:srgbClr val="FF3300"/>
-                </a:solidFill>
-                <a:latin typeface="Calibri Light" panose="020F0302020204030204" pitchFamily="34" charset="0"/>
-                <a:ea typeface="Calibri Light" panose="020F0302020204030204" pitchFamily="34" charset="0"/>
-                <a:cs typeface="Calibri Light" panose="020F0302020204030204" pitchFamily="34" charset="0"/>
-              </a:rPr>
-              <a:t>MFL06 :</a:t>
-            </a:r>
-            <a:br>
-              <a:rPr lang="en-GB" b="1" dirty="0">
-                <a:solidFill>
-                  <a:srgbClr val="FF0000"/>
-                </a:solidFill>
-                <a:latin typeface="Calibri Light" panose="020F0302020204030204" pitchFamily="34" charset="0"/>
-                <a:ea typeface="Calibri Light" panose="020F0302020204030204" pitchFamily="34" charset="0"/>
-                <a:cs typeface="Calibri Light" panose="020F0302020204030204" pitchFamily="34" charset="0"/>
-              </a:rPr>
-            </a:br>
-            <a:r>
-              <a:rPr lang="en-US" b="1" dirty="0">
-                <a:solidFill>
-                  <a:srgbClr val="FF3300"/>
-                </a:solidFill>
-                <a:latin typeface="Calibri Light" panose="020F0302020204030204" pitchFamily="34" charset="0"/>
-                <a:ea typeface="Calibri Light" panose="020F0302020204030204" pitchFamily="34" charset="0"/>
-                <a:cs typeface="Calibri Light" panose="020F0302020204030204" pitchFamily="34" charset="0"/>
-              </a:rPr>
-              <a:t>Stepper Motor Control with Accelerometer MPU6050</a:t>
-            </a:r>
-            <a:endParaRPr lang="en-GB" b="1" dirty="0">
-              <a:solidFill>
-                <a:srgbClr val="FF3300"/>
-              </a:solidFill>
-              <a:latin typeface="Calibri Light" panose="020F0302020204030204" pitchFamily="34" charset="0"/>
-              <a:ea typeface="Calibri Light" panose="020F0302020204030204" pitchFamily="34" charset="0"/>
-              <a:cs typeface="Calibri Light" panose="020F0302020204030204" pitchFamily="34" charset="0"/>
-            </a:endParaRPr>
-          </a:p>
-        </p:txBody>
-      </p:sp>
-      <p:sp>
-        <p:nvSpPr>
-          <p:cNvPr id="14" name="Rectangle 13">
-            <a:extLst>
-              <a:ext uri="{FF2B5EF4-FFF2-40B4-BE49-F238E27FC236}">
-                <a16:creationId xmlns:a16="http://schemas.microsoft.com/office/drawing/2014/main" id="{5E3CDE97-84C3-1876-82AC-C63AC20F50A3}"/>
-              </a:ext>
-            </a:extLst>
-          </p:cNvPr>
-          <p:cNvSpPr/>
-          <p:nvPr/>
-        </p:nvSpPr>
-        <p:spPr>
-          <a:xfrm>
-            <a:off x="9640530" y="3241012"/>
-            <a:ext cx="2072414" cy="1944942"/>
-          </a:xfrm>
-          <a:prstGeom prst="rect">
-            <a:avLst/>
-          </a:prstGeom>
-          <a:noFill/>
-          <a:ln w="57150">
-            <a:solidFill>
-              <a:srgbClr val="FFFF00"/>
-            </a:solidFill>
-          </a:ln>
-        </p:spPr>
-        <p:style>
-          <a:lnRef idx="2">
-            <a:schemeClr val="accent1">
-              <a:shade val="15000"/>
-            </a:schemeClr>
-          </a:lnRef>
-          <a:fillRef idx="1">
-            <a:schemeClr val="accent1"/>
-          </a:fillRef>
-          <a:effectRef idx="0">
-            <a:schemeClr val="accent1"/>
-          </a:effectRef>
-          <a:fontRef idx="minor">
-            <a:schemeClr val="lt1"/>
-          </a:fontRef>
-        </p:style>
-        <p:txBody>
-          <a:bodyPr rtlCol="0" anchor="ctr"/>
-          <a:lstStyle/>
-          <a:p>
-            <a:pPr algn="ctr"/>
-            <a:endParaRPr lang="en-GB"/>
+              <a:t>Code for Lesson MFL06 (MFL06_Stepper_Accelerometer.ino):</a:t>
+            </a:r>
           </a:p>
         </p:txBody>
       </p:sp>
